--- a/Comparative Evaluation of Space Mean Speed Estimation Methods.pptx
+++ b/Comparative Evaluation of Space Mean Speed Estimation Methods.pptx
@@ -12,8 +12,11 @@
     <p:sldId id="262" r:id="rId6"/>
     <p:sldId id="263" r:id="rId7"/>
     <p:sldId id="264" r:id="rId8"/>
-    <p:sldId id="259" r:id="rId9"/>
-    <p:sldId id="260" r:id="rId10"/>
+    <p:sldId id="266" r:id="rId9"/>
+    <p:sldId id="267" r:id="rId10"/>
+    <p:sldId id="259" r:id="rId11"/>
+    <p:sldId id="260" r:id="rId12"/>
+    <p:sldId id="265" r:id="rId13"/>
   </p:sldIdLst>
   <p:sldSz cx="12192000" cy="6858000"/>
   <p:notesSz cx="6858000" cy="9144000"/>
@@ -3418,6 +3421,375 @@
 </p:sld>
 </file>
 
+<file path=ppt/slides/slide10.xml><?xml version="1.0" encoding="utf-8"?>
+<p:sld xmlns:a="http://schemas.openxmlformats.org/drawingml/2006/main" xmlns:r="http://schemas.openxmlformats.org/officeDocument/2006/relationships" xmlns:p="http://schemas.openxmlformats.org/presentationml/2006/main">
+  <p:cSld>
+    <p:spTree>
+      <p:nvGrpSpPr>
+        <p:cNvPr id="1" name="">
+          <a:extLst>
+            <a:ext uri="{FF2B5EF4-FFF2-40B4-BE49-F238E27FC236}">
+              <a16:creationId xmlns:a16="http://schemas.microsoft.com/office/drawing/2014/main" id="{AF107DA5-F531-1CA3-B927-12F84C505E3E}"/>
+            </a:ext>
+          </a:extLst>
+        </p:cNvPr>
+        <p:cNvGrpSpPr/>
+        <p:nvPr/>
+      </p:nvGrpSpPr>
+      <p:grpSpPr>
+        <a:xfrm>
+          <a:off x="0" y="0"/>
+          <a:ext cx="0" cy="0"/>
+          <a:chOff x="0" y="0"/>
+          <a:chExt cx="0" cy="0"/>
+        </a:xfrm>
+      </p:grpSpPr>
+      <p:sp>
+        <p:nvSpPr>
+          <p:cNvPr id="2" name="Title 1">
+            <a:extLst>
+              <a:ext uri="{FF2B5EF4-FFF2-40B4-BE49-F238E27FC236}">
+                <a16:creationId xmlns:a16="http://schemas.microsoft.com/office/drawing/2014/main" id="{32E17F7F-9F5B-0D2E-E450-A0A5D91AA004}"/>
+              </a:ext>
+            </a:extLst>
+          </p:cNvPr>
+          <p:cNvSpPr>
+            <a:spLocks noGrp="1"/>
+          </p:cNvSpPr>
+          <p:nvPr>
+            <p:ph type="title"/>
+          </p:nvPr>
+        </p:nvSpPr>
+        <p:spPr>
+          <a:xfrm>
+            <a:off x="2566219" y="117987"/>
+            <a:ext cx="7059561" cy="1006475"/>
+          </a:xfrm>
+        </p:spPr>
+        <p:txBody>
+          <a:bodyPr>
+            <a:noAutofit/>
+          </a:bodyPr>
+          <a:lstStyle/>
+          <a:p>
+            <a:pPr algn="ctr"/>
+            <a:r>
+              <a:rPr lang="en-US" sz="3600" b="1" dirty="0">
+                <a:solidFill>
+                  <a:schemeClr val="accent1">
+                    <a:lumMod val="50000"/>
+                  </a:schemeClr>
+                </a:solidFill>
+                <a:effectLst>
+                  <a:outerShdw blurRad="38100" dist="38100" dir="2700000" algn="tl">
+                    <a:srgbClr val="000000">
+                      <a:alpha val="43137"/>
+                    </a:srgbClr>
+                  </a:outerShdw>
+                </a:effectLst>
+              </a:rPr>
+              <a:t>Trajectory plots</a:t>
+            </a:r>
+          </a:p>
+        </p:txBody>
+      </p:sp>
+      <p:pic>
+        <p:nvPicPr>
+          <p:cNvPr id="7" name="Content Placeholder 6">
+            <a:extLst>
+              <a:ext uri="{FF2B5EF4-FFF2-40B4-BE49-F238E27FC236}">
+                <a16:creationId xmlns:a16="http://schemas.microsoft.com/office/drawing/2014/main" id="{1FA9D840-4EEF-B689-778F-7D4BE73BCF6B}"/>
+              </a:ext>
+            </a:extLst>
+          </p:cNvPr>
+          <p:cNvPicPr>
+            <a:picLocks noGrp="1" noChangeAspect="1"/>
+          </p:cNvPicPr>
+          <p:nvPr>
+            <p:ph idx="1"/>
+          </p:nvPr>
+        </p:nvPicPr>
+        <p:blipFill>
+          <a:blip r:embed="rId2">
+            <a:extLst>
+              <a:ext uri="{28A0092B-C50C-407E-A947-70E740481C1C}">
+                <a14:useLocalDpi xmlns:a14="http://schemas.microsoft.com/office/drawing/2010/main" val="0"/>
+              </a:ext>
+            </a:extLst>
+          </a:blip>
+          <a:stretch>
+            <a:fillRect/>
+          </a:stretch>
+        </p:blipFill>
+        <p:spPr>
+          <a:xfrm>
+            <a:off x="2373551" y="1422503"/>
+            <a:ext cx="7252229" cy="4351338"/>
+          </a:xfrm>
+          <a:prstGeom prst="rect">
+            <a:avLst/>
+          </a:prstGeom>
+        </p:spPr>
+      </p:pic>
+    </p:spTree>
+    <p:extLst>
+      <p:ext uri="{BB962C8B-B14F-4D97-AF65-F5344CB8AC3E}">
+        <p14:creationId xmlns:p14="http://schemas.microsoft.com/office/powerpoint/2010/main" val="3373266397"/>
+      </p:ext>
+    </p:extLst>
+  </p:cSld>
+  <p:clrMapOvr>
+    <a:masterClrMapping/>
+  </p:clrMapOvr>
+</p:sld>
+</file>
+
+<file path=ppt/slides/slide11.xml><?xml version="1.0" encoding="utf-8"?>
+<p:sld xmlns:a="http://schemas.openxmlformats.org/drawingml/2006/main" xmlns:r="http://schemas.openxmlformats.org/officeDocument/2006/relationships" xmlns:p="http://schemas.openxmlformats.org/presentationml/2006/main">
+  <p:cSld>
+    <p:spTree>
+      <p:nvGrpSpPr>
+        <p:cNvPr id="1" name="">
+          <a:extLst>
+            <a:ext uri="{FF2B5EF4-FFF2-40B4-BE49-F238E27FC236}">
+              <a16:creationId xmlns:a16="http://schemas.microsoft.com/office/drawing/2014/main" id="{D3E2BFA5-1E58-07C4-B661-CA36BAC1FF42}"/>
+            </a:ext>
+          </a:extLst>
+        </p:cNvPr>
+        <p:cNvGrpSpPr/>
+        <p:nvPr/>
+      </p:nvGrpSpPr>
+      <p:grpSpPr>
+        <a:xfrm>
+          <a:off x="0" y="0"/>
+          <a:ext cx="0" cy="0"/>
+          <a:chOff x="0" y="0"/>
+          <a:chExt cx="0" cy="0"/>
+        </a:xfrm>
+      </p:grpSpPr>
+      <p:sp>
+        <p:nvSpPr>
+          <p:cNvPr id="2" name="Title 1">
+            <a:extLst>
+              <a:ext uri="{FF2B5EF4-FFF2-40B4-BE49-F238E27FC236}">
+                <a16:creationId xmlns:a16="http://schemas.microsoft.com/office/drawing/2014/main" id="{557D5A64-8DA1-75E2-3731-8BB4D216A103}"/>
+              </a:ext>
+            </a:extLst>
+          </p:cNvPr>
+          <p:cNvSpPr>
+            <a:spLocks noGrp="1"/>
+          </p:cNvSpPr>
+          <p:nvPr>
+            <p:ph type="title"/>
+          </p:nvPr>
+        </p:nvSpPr>
+        <p:spPr>
+          <a:xfrm>
+            <a:off x="2566219" y="117987"/>
+            <a:ext cx="7059561" cy="1006475"/>
+          </a:xfrm>
+        </p:spPr>
+        <p:txBody>
+          <a:bodyPr>
+            <a:noAutofit/>
+          </a:bodyPr>
+          <a:lstStyle/>
+          <a:p>
+            <a:pPr algn="ctr"/>
+            <a:r>
+              <a:rPr lang="en-US" sz="3600" b="1" dirty="0">
+                <a:solidFill>
+                  <a:schemeClr val="accent1">
+                    <a:lumMod val="50000"/>
+                  </a:schemeClr>
+                </a:solidFill>
+                <a:effectLst>
+                  <a:outerShdw blurRad="38100" dist="38100" dir="2700000" algn="tl">
+                    <a:srgbClr val="000000">
+                      <a:alpha val="43137"/>
+                    </a:srgbClr>
+                  </a:outerShdw>
+                </a:effectLst>
+              </a:rPr>
+              <a:t>Comparison with Edie’s aggregation method</a:t>
+            </a:r>
+          </a:p>
+        </p:txBody>
+      </p:sp>
+      <p:pic>
+        <p:nvPicPr>
+          <p:cNvPr id="6" name="Content Placeholder 5">
+            <a:extLst>
+              <a:ext uri="{FF2B5EF4-FFF2-40B4-BE49-F238E27FC236}">
+                <a16:creationId xmlns:a16="http://schemas.microsoft.com/office/drawing/2014/main" id="{99F545C1-63D2-FF7C-03D5-F2C67A5F26C8}"/>
+              </a:ext>
+            </a:extLst>
+          </p:cNvPr>
+          <p:cNvPicPr>
+            <a:picLocks noGrp="1" noChangeAspect="1"/>
+          </p:cNvPicPr>
+          <p:nvPr>
+            <p:ph idx="1"/>
+          </p:nvPr>
+        </p:nvPicPr>
+        <p:blipFill>
+          <a:blip r:embed="rId2">
+            <a:extLst>
+              <a:ext uri="{28A0092B-C50C-407E-A947-70E740481C1C}">
+                <a14:useLocalDpi xmlns:a14="http://schemas.microsoft.com/office/drawing/2010/main" val="0"/>
+              </a:ext>
+            </a:extLst>
+          </a:blip>
+          <a:stretch>
+            <a:fillRect/>
+          </a:stretch>
+        </p:blipFill>
+        <p:spPr>
+          <a:xfrm>
+            <a:off x="2107273" y="1253331"/>
+            <a:ext cx="7977452" cy="4351338"/>
+          </a:xfrm>
+          <a:prstGeom prst="rect">
+            <a:avLst/>
+          </a:prstGeom>
+        </p:spPr>
+      </p:pic>
+    </p:spTree>
+    <p:extLst>
+      <p:ext uri="{BB962C8B-B14F-4D97-AF65-F5344CB8AC3E}">
+        <p14:creationId xmlns:p14="http://schemas.microsoft.com/office/powerpoint/2010/main" val="1188017702"/>
+      </p:ext>
+    </p:extLst>
+  </p:cSld>
+  <p:clrMapOvr>
+    <a:masterClrMapping/>
+  </p:clrMapOvr>
+</p:sld>
+</file>
+
+<file path=ppt/slides/slide12.xml><?xml version="1.0" encoding="utf-8"?>
+<p:sld xmlns:a="http://schemas.openxmlformats.org/drawingml/2006/main" xmlns:r="http://schemas.openxmlformats.org/officeDocument/2006/relationships" xmlns:p="http://schemas.openxmlformats.org/presentationml/2006/main">
+  <p:cSld>
+    <p:spTree>
+      <p:nvGrpSpPr>
+        <p:cNvPr id="1" name="">
+          <a:extLst>
+            <a:ext uri="{FF2B5EF4-FFF2-40B4-BE49-F238E27FC236}">
+              <a16:creationId xmlns:a16="http://schemas.microsoft.com/office/drawing/2014/main" id="{D8E0937A-1499-E147-3227-CF56F078001E}"/>
+            </a:ext>
+          </a:extLst>
+        </p:cNvPr>
+        <p:cNvGrpSpPr/>
+        <p:nvPr/>
+      </p:nvGrpSpPr>
+      <p:grpSpPr>
+        <a:xfrm>
+          <a:off x="0" y="0"/>
+          <a:ext cx="0" cy="0"/>
+          <a:chOff x="0" y="0"/>
+          <a:chExt cx="0" cy="0"/>
+        </a:xfrm>
+      </p:grpSpPr>
+      <p:sp>
+        <p:nvSpPr>
+          <p:cNvPr id="2" name="Title 1">
+            <a:extLst>
+              <a:ext uri="{FF2B5EF4-FFF2-40B4-BE49-F238E27FC236}">
+                <a16:creationId xmlns:a16="http://schemas.microsoft.com/office/drawing/2014/main" id="{993A3388-4FE7-13F2-A5DE-0F84A6085412}"/>
+              </a:ext>
+            </a:extLst>
+          </p:cNvPr>
+          <p:cNvSpPr>
+            <a:spLocks noGrp="1"/>
+          </p:cNvSpPr>
+          <p:nvPr>
+            <p:ph type="title"/>
+          </p:nvPr>
+        </p:nvSpPr>
+        <p:spPr>
+          <a:xfrm>
+            <a:off x="2566219" y="117987"/>
+            <a:ext cx="7059561" cy="1006475"/>
+          </a:xfrm>
+        </p:spPr>
+        <p:txBody>
+          <a:bodyPr>
+            <a:noAutofit/>
+          </a:bodyPr>
+          <a:lstStyle/>
+          <a:p>
+            <a:pPr algn="ctr"/>
+            <a:r>
+              <a:rPr lang="en-US" sz="3600" b="1" dirty="0">
+                <a:solidFill>
+                  <a:schemeClr val="accent1">
+                    <a:lumMod val="50000"/>
+                  </a:schemeClr>
+                </a:solidFill>
+                <a:effectLst>
+                  <a:outerShdw blurRad="38100" dist="38100" dir="2700000" algn="tl">
+                    <a:srgbClr val="000000">
+                      <a:alpha val="43137"/>
+                    </a:srgbClr>
+                  </a:outerShdw>
+                </a:effectLst>
+              </a:rPr>
+              <a:t>Comparison with entry-based count aggregation</a:t>
+            </a:r>
+          </a:p>
+        </p:txBody>
+      </p:sp>
+      <p:pic>
+        <p:nvPicPr>
+          <p:cNvPr id="7" name="Content Placeholder 6">
+            <a:extLst>
+              <a:ext uri="{FF2B5EF4-FFF2-40B4-BE49-F238E27FC236}">
+                <a16:creationId xmlns:a16="http://schemas.microsoft.com/office/drawing/2014/main" id="{EAEB0842-6C1C-39D5-6532-EF96DAF5C215}"/>
+              </a:ext>
+            </a:extLst>
+          </p:cNvPr>
+          <p:cNvPicPr>
+            <a:picLocks noGrp="1" noChangeAspect="1"/>
+          </p:cNvPicPr>
+          <p:nvPr>
+            <p:ph idx="1"/>
+          </p:nvPr>
+        </p:nvPicPr>
+        <p:blipFill>
+          <a:blip r:embed="rId2">
+            <a:extLst>
+              <a:ext uri="{28A0092B-C50C-407E-A947-70E740481C1C}">
+                <a14:useLocalDpi xmlns:a14="http://schemas.microsoft.com/office/drawing/2010/main" val="0"/>
+              </a:ext>
+            </a:extLst>
+          </a:blip>
+          <a:stretch>
+            <a:fillRect/>
+          </a:stretch>
+        </p:blipFill>
+        <p:spPr>
+          <a:xfrm>
+            <a:off x="1458345" y="1371600"/>
+            <a:ext cx="9220199" cy="5029200"/>
+          </a:xfrm>
+          <a:prstGeom prst="rect">
+            <a:avLst/>
+          </a:prstGeom>
+        </p:spPr>
+      </p:pic>
+    </p:spTree>
+    <p:extLst>
+      <p:ext uri="{BB962C8B-B14F-4D97-AF65-F5344CB8AC3E}">
+        <p14:creationId xmlns:p14="http://schemas.microsoft.com/office/powerpoint/2010/main" val="1207162312"/>
+      </p:ext>
+    </p:extLst>
+  </p:cSld>
+  <p:clrMapOvr>
+    <a:masterClrMapping/>
+  </p:clrMapOvr>
+</p:sld>
+</file>
+
 <file path=ppt/slides/slide2.xml><?xml version="1.0" encoding="utf-8"?>
 <p:sld xmlns:a="http://schemas.openxmlformats.org/drawingml/2006/main" xmlns:r="http://schemas.openxmlformats.org/officeDocument/2006/relationships" xmlns:p="http://schemas.openxmlformats.org/presentationml/2006/main">
   <p:cSld>
@@ -3550,6 +3922,15 @@
             <a:r>
               <a:rPr lang="en-US" dirty="0"/>
               <a:t>Method 3: Trajectory based aggregation of Edie's Space Mean Speed</a:t>
+            </a:r>
+          </a:p>
+          <a:p>
+            <a:pPr marL="0" indent="0">
+              <a:buNone/>
+            </a:pPr>
+            <a:r>
+              <a:rPr lang="en-US" dirty="0"/>
+              <a:t>Method 4: Entry-Based aggregated Count Method for Space Mean Speed Estimation</a:t>
             </a:r>
           </a:p>
         </p:txBody>
@@ -4913,7 +5294,7 @@
                 <a:ea typeface="+mn-ea"/>
                 <a:cs typeface="+mn-cs"/>
               </a:rPr>
-              <a:t>Method 3: Trajectory based aggregation of Edie's Space Mean Speed</a:t>
+              <a:t>Method 3: Trajectory based aggregation of Edie's Space Mean Speed (contd.)</a:t>
             </a:r>
           </a:p>
         </p:txBody>
@@ -5459,7 +5840,7 @@
         <p:cNvPr id="1" name="">
           <a:extLst>
             <a:ext uri="{FF2B5EF4-FFF2-40B4-BE49-F238E27FC236}">
-              <a16:creationId xmlns:a16="http://schemas.microsoft.com/office/drawing/2014/main" id="{AF107DA5-F531-1CA3-B927-12F84C505E3E}"/>
+              <a16:creationId xmlns:a16="http://schemas.microsoft.com/office/drawing/2014/main" id="{1D7E0520-6316-B708-4EF2-70A79D0D7599}"/>
             </a:ext>
           </a:extLst>
         </p:cNvPr>
@@ -5479,7 +5860,7 @@
           <p:cNvPr id="2" name="Title 1">
             <a:extLst>
               <a:ext uri="{FF2B5EF4-FFF2-40B4-BE49-F238E27FC236}">
-                <a16:creationId xmlns:a16="http://schemas.microsoft.com/office/drawing/2014/main" id="{32E17F7F-9F5B-0D2E-E450-A0A5D91AA004}"/>
+                <a16:creationId xmlns:a16="http://schemas.microsoft.com/office/drawing/2014/main" id="{3B205029-F1FF-3C32-45AF-89D9AC58FE1A}"/>
               </a:ext>
             </a:extLst>
           </p:cNvPr>
@@ -5492,8 +5873,8 @@
         </p:nvSpPr>
         <p:spPr>
           <a:xfrm>
-            <a:off x="2566219" y="117987"/>
-            <a:ext cx="7059561" cy="1006475"/>
+            <a:off x="2566219" y="0"/>
+            <a:ext cx="7629833" cy="1006475"/>
           </a:xfrm>
         </p:spPr>
         <p:txBody>
@@ -5502,9 +5883,28 @@
           </a:bodyPr>
           <a:lstStyle/>
           <a:p>
-            <a:pPr algn="ctr"/>
-            <a:r>
-              <a:rPr lang="en-US" sz="3600" b="1" dirty="0">
+            <a:pPr marL="0" marR="0" lvl="0" indent="0" algn="ctr" defTabSz="914400" rtl="0" eaLnBrk="1" fontAlgn="auto" latinLnBrk="0" hangingPunct="1">
+              <a:lnSpc>
+                <a:spcPct val="90000"/>
+              </a:lnSpc>
+              <a:spcBef>
+                <a:spcPts val="1000"/>
+              </a:spcBef>
+              <a:spcAft>
+                <a:spcPts val="0"/>
+              </a:spcAft>
+              <a:buClrTx/>
+              <a:buSzTx/>
+              <a:buFont typeface="Arial" panose="020B0604020202020204" pitchFamily="34" charset="0"/>
+              <a:buNone/>
+              <a:tabLst/>
+              <a:defRPr/>
+            </a:pPr>
+            <a:r>
+              <a:rPr kumimoji="0" lang="en-US" sz="2800" b="1" i="0" u="none" strike="noStrike" kern="1200" cap="none" spc="0" normalizeH="0" baseline="0" noProof="0" dirty="0">
+                <a:ln>
+                  <a:noFill/>
+                </a:ln>
                 <a:solidFill>
                   <a:schemeClr val="accent1">
                     <a:lumMod val="50000"/>
@@ -5517,27 +5917,30 @@
                     </a:srgbClr>
                   </a:outerShdw>
                 </a:effectLst>
+                <a:uLnTx/>
+                <a:uFillTx/>
+                <a:latin typeface="Calibri" panose="020F0502020204030204"/>
+                <a:ea typeface="+mn-ea"/>
+                <a:cs typeface="+mn-cs"/>
               </a:rPr>
-              <a:t>Trajectory plots</a:t>
+              <a:t>Method 4: Entry-Based aggregated Count Method for Space Mean Speed Estimation (contd.)</a:t>
             </a:r>
           </a:p>
         </p:txBody>
       </p:sp>
       <p:pic>
         <p:nvPicPr>
-          <p:cNvPr id="7" name="Content Placeholder 6">
-            <a:extLst>
-              <a:ext uri="{FF2B5EF4-FFF2-40B4-BE49-F238E27FC236}">
-                <a16:creationId xmlns:a16="http://schemas.microsoft.com/office/drawing/2014/main" id="{1FA9D840-4EEF-B689-778F-7D4BE73BCF6B}"/>
+          <p:cNvPr id="5" name="Picture 4">
+            <a:extLst>
+              <a:ext uri="{FF2B5EF4-FFF2-40B4-BE49-F238E27FC236}">
+                <a16:creationId xmlns:a16="http://schemas.microsoft.com/office/drawing/2014/main" id="{C5BC29B2-A2E3-C11C-84A1-49CEBDADD1A3}"/>
               </a:ext>
             </a:extLst>
           </p:cNvPr>
           <p:cNvPicPr>
-            <a:picLocks noGrp="1" noChangeAspect="1"/>
+            <a:picLocks noChangeAspect="1"/>
           </p:cNvPicPr>
-          <p:nvPr>
-            <p:ph idx="1"/>
-          </p:nvPr>
+          <p:nvPr/>
         </p:nvPicPr>
         <p:blipFill>
           <a:blip r:embed="rId2">
@@ -5553,8 +5956,44 @@
         </p:blipFill>
         <p:spPr>
           <a:xfrm>
-            <a:off x="2373551" y="1422503"/>
-            <a:ext cx="7252229" cy="4351338"/>
+            <a:off x="72390" y="1500525"/>
+            <a:ext cx="6560820" cy="4427220"/>
+          </a:xfrm>
+          <a:prstGeom prst="rect">
+            <a:avLst/>
+          </a:prstGeom>
+        </p:spPr>
+      </p:pic>
+      <p:pic>
+        <p:nvPicPr>
+          <p:cNvPr id="7" name="Picture 6">
+            <a:extLst>
+              <a:ext uri="{FF2B5EF4-FFF2-40B4-BE49-F238E27FC236}">
+                <a16:creationId xmlns:a16="http://schemas.microsoft.com/office/drawing/2014/main" id="{8FEE4513-955C-9FCF-9E8E-8D17187BE008}"/>
+              </a:ext>
+            </a:extLst>
+          </p:cNvPr>
+          <p:cNvPicPr>
+            <a:picLocks noChangeAspect="1"/>
+          </p:cNvPicPr>
+          <p:nvPr/>
+        </p:nvPicPr>
+        <p:blipFill>
+          <a:blip r:embed="rId3">
+            <a:extLst>
+              <a:ext uri="{28A0092B-C50C-407E-A947-70E740481C1C}">
+                <a14:useLocalDpi xmlns:a14="http://schemas.microsoft.com/office/drawing/2010/main" val="0"/>
+              </a:ext>
+            </a:extLst>
+          </a:blip>
+          <a:stretch>
+            <a:fillRect/>
+          </a:stretch>
+        </p:blipFill>
+        <p:spPr>
+          <a:xfrm>
+            <a:off x="6312310" y="2119581"/>
+            <a:ext cx="5807300" cy="2920434"/>
           </a:xfrm>
           <a:prstGeom prst="rect">
             <a:avLst/>
@@ -5564,7 +6003,7 @@
     </p:spTree>
     <p:extLst>
       <p:ext uri="{BB962C8B-B14F-4D97-AF65-F5344CB8AC3E}">
-        <p14:creationId xmlns:p14="http://schemas.microsoft.com/office/powerpoint/2010/main" val="3373266397"/>
+        <p14:creationId xmlns:p14="http://schemas.microsoft.com/office/powerpoint/2010/main" val="3316693728"/>
       </p:ext>
     </p:extLst>
   </p:cSld>
@@ -5582,7 +6021,7 @@
         <p:cNvPr id="1" name="">
           <a:extLst>
             <a:ext uri="{FF2B5EF4-FFF2-40B4-BE49-F238E27FC236}">
-              <a16:creationId xmlns:a16="http://schemas.microsoft.com/office/drawing/2014/main" id="{D3E2BFA5-1E58-07C4-B661-CA36BAC1FF42}"/>
+              <a16:creationId xmlns:a16="http://schemas.microsoft.com/office/drawing/2014/main" id="{5C217648-4373-A326-F2CE-2EA6BCD45414}"/>
             </a:ext>
           </a:extLst>
         </p:cNvPr>
@@ -5602,7 +6041,7 @@
           <p:cNvPr id="2" name="Title 1">
             <a:extLst>
               <a:ext uri="{FF2B5EF4-FFF2-40B4-BE49-F238E27FC236}">
-                <a16:creationId xmlns:a16="http://schemas.microsoft.com/office/drawing/2014/main" id="{557D5A64-8DA1-75E2-3731-8BB4D216A103}"/>
+                <a16:creationId xmlns:a16="http://schemas.microsoft.com/office/drawing/2014/main" id="{F064DB02-C8DB-74FA-9EC4-0FE31B63A77E}"/>
               </a:ext>
             </a:extLst>
           </p:cNvPr>
@@ -5615,8 +6054,8 @@
         </p:nvSpPr>
         <p:spPr>
           <a:xfrm>
-            <a:off x="2566219" y="117987"/>
-            <a:ext cx="7059561" cy="1006475"/>
+            <a:off x="2566219" y="0"/>
+            <a:ext cx="7855975" cy="1006475"/>
           </a:xfrm>
         </p:spPr>
         <p:txBody>
@@ -5625,9 +6064,28 @@
           </a:bodyPr>
           <a:lstStyle/>
           <a:p>
-            <a:pPr algn="ctr"/>
-            <a:r>
-              <a:rPr lang="en-US" sz="3600" b="1" dirty="0">
+            <a:pPr marL="0" marR="0" lvl="0" indent="0" algn="ctr" defTabSz="914400" rtl="0" eaLnBrk="1" fontAlgn="auto" latinLnBrk="0" hangingPunct="1">
+              <a:lnSpc>
+                <a:spcPct val="90000"/>
+              </a:lnSpc>
+              <a:spcBef>
+                <a:spcPts val="1000"/>
+              </a:spcBef>
+              <a:spcAft>
+                <a:spcPts val="0"/>
+              </a:spcAft>
+              <a:buClrTx/>
+              <a:buSzTx/>
+              <a:buFont typeface="Arial" panose="020B0604020202020204" pitchFamily="34" charset="0"/>
+              <a:buNone/>
+              <a:tabLst/>
+              <a:defRPr/>
+            </a:pPr>
+            <a:r>
+              <a:rPr kumimoji="0" lang="en-US" sz="2800" b="1" i="0" u="none" strike="noStrike" kern="1200" cap="none" spc="0" normalizeH="0" baseline="0" noProof="0" dirty="0">
+                <a:ln>
+                  <a:noFill/>
+                </a:ln>
                 <a:solidFill>
                   <a:schemeClr val="accent1">
                     <a:lumMod val="50000"/>
@@ -5640,54 +6098,527 @@
                     </a:srgbClr>
                   </a:outerShdw>
                 </a:effectLst>
+                <a:uLnTx/>
+                <a:uFillTx/>
+                <a:latin typeface="Calibri" panose="020F0502020204030204"/>
+                <a:ea typeface="+mn-ea"/>
+                <a:cs typeface="+mn-cs"/>
               </a:rPr>
-              <a:t>Comparison</a:t>
-            </a:r>
-          </a:p>
-        </p:txBody>
-      </p:sp>
-      <p:pic>
-        <p:nvPicPr>
-          <p:cNvPr id="6" name="Content Placeholder 5">
-            <a:extLst>
-              <a:ext uri="{FF2B5EF4-FFF2-40B4-BE49-F238E27FC236}">
-                <a16:creationId xmlns:a16="http://schemas.microsoft.com/office/drawing/2014/main" id="{99F545C1-63D2-FF7C-03D5-F2C67A5F26C8}"/>
-              </a:ext>
-            </a:extLst>
-          </p:cNvPr>
-          <p:cNvPicPr>
-            <a:picLocks noGrp="1" noChangeAspect="1"/>
-          </p:cNvPicPr>
-          <p:nvPr>
-            <p:ph idx="1"/>
-          </p:nvPr>
-        </p:nvPicPr>
-        <p:blipFill>
-          <a:blip r:embed="rId2">
-            <a:extLst>
-              <a:ext uri="{28A0092B-C50C-407E-A947-70E740481C1C}">
-                <a14:useLocalDpi xmlns:a14="http://schemas.microsoft.com/office/drawing/2010/main" val="0"/>
-              </a:ext>
-            </a:extLst>
-          </a:blip>
-          <a:stretch>
-            <a:fillRect/>
-          </a:stretch>
-        </p:blipFill>
+              <a:t>Method 4: Entry-Based aggregated Count Method for Space Mean Speed Estimation(contd.)</a:t>
+            </a:r>
+          </a:p>
+        </p:txBody>
+      </p:sp>
+      <p:sp>
+        <p:nvSpPr>
+          <p:cNvPr id="4" name="TextBox 3">
+            <a:extLst>
+              <a:ext uri="{FF2B5EF4-FFF2-40B4-BE49-F238E27FC236}">
+                <a16:creationId xmlns:a16="http://schemas.microsoft.com/office/drawing/2014/main" id="{09922D2A-8475-7B9A-61AD-82CE87D81322}"/>
+              </a:ext>
+            </a:extLst>
+          </p:cNvPr>
+          <p:cNvSpPr txBox="1"/>
+          <p:nvPr/>
+        </p:nvSpPr>
         <p:spPr>
           <a:xfrm>
-            <a:off x="2107273" y="1253331"/>
-            <a:ext cx="7977452" cy="4351338"/>
+            <a:off x="324465" y="894736"/>
+            <a:ext cx="11769211" cy="6001643"/>
           </a:xfrm>
           <a:prstGeom prst="rect">
             <a:avLst/>
           </a:prstGeom>
+          <a:noFill/>
         </p:spPr>
-      </p:pic>
+        <p:txBody>
+          <a:bodyPr wrap="square" numCol="3" spcCol="182880">
+            <a:spAutoFit/>
+          </a:bodyPr>
+          <a:lstStyle/>
+          <a:p>
+            <a:r>
+              <a:rPr lang="en-US" sz="1500" b="1" u="sng" dirty="0">
+                <a:solidFill>
+                  <a:srgbClr val="FF0000"/>
+                </a:solidFill>
+              </a:rPr>
+              <a:t>Pseudo Code:</a:t>
+            </a:r>
+          </a:p>
+          <a:p>
+            <a:r>
+              <a:rPr lang="en-US" sz="1500" dirty="0"/>
+              <a:t>INPUT:</a:t>
+            </a:r>
+          </a:p>
+          <a:p>
+            <a:r>
+              <a:rPr lang="en-US" sz="1500" dirty="0"/>
+              <a:t>    trajectory data (Track ID, Time, position)</a:t>
+            </a:r>
+          </a:p>
+          <a:p>
+            <a:r>
+              <a:rPr lang="en-US" sz="1500" dirty="0"/>
+              <a:t>    </a:t>
+            </a:r>
+            <a:r>
+              <a:rPr lang="en-US" sz="1500" dirty="0" err="1"/>
+              <a:t>road_length</a:t>
+            </a:r>
+            <a:r>
+              <a:rPr lang="en-US" sz="1500" dirty="0"/>
+              <a:t> L</a:t>
+            </a:r>
+          </a:p>
+          <a:p>
+            <a:r>
+              <a:rPr lang="en-US" sz="1500" dirty="0"/>
+              <a:t>    list of aggregation intervals (e.g., 1s, 2s, 5s, 10s)</a:t>
+            </a:r>
+          </a:p>
+          <a:p>
+            <a:endParaRPr lang="en-US" sz="1500" dirty="0"/>
+          </a:p>
+          <a:p>
+            <a:r>
+              <a:rPr lang="en-US" sz="1500" dirty="0"/>
+              <a:t>PREPROCESS:</a:t>
+            </a:r>
+          </a:p>
+          <a:p>
+            <a:r>
+              <a:rPr lang="en-US" sz="1500" dirty="0"/>
+              <a:t>    Sort data by Track ID and Time</a:t>
+            </a:r>
+          </a:p>
+          <a:p>
+            <a:r>
+              <a:rPr lang="en-US" sz="1500" dirty="0"/>
+              <a:t>    Define study segment [</a:t>
+            </a:r>
+            <a:r>
+              <a:rPr lang="en-US" sz="1500" dirty="0" err="1"/>
+              <a:t>x_start</a:t>
+            </a:r>
+            <a:r>
+              <a:rPr lang="en-US" sz="1500" dirty="0"/>
+              <a:t>, </a:t>
+            </a:r>
+            <a:r>
+              <a:rPr lang="en-US" sz="1500" dirty="0" err="1"/>
+              <a:t>x_end</a:t>
+            </a:r>
+            <a:r>
+              <a:rPr lang="en-US" sz="1500" dirty="0"/>
+              <a:t>]</a:t>
+            </a:r>
+          </a:p>
+          <a:p>
+            <a:endParaRPr lang="en-US" sz="1500" dirty="0"/>
+          </a:p>
+          <a:p>
+            <a:r>
+              <a:rPr lang="en-US" sz="1500" dirty="0"/>
+              <a:t>FOR each aggregation interval T:</a:t>
+            </a:r>
+          </a:p>
+          <a:p>
+            <a:endParaRPr lang="en-US" sz="1500" dirty="0"/>
+          </a:p>
+          <a:p>
+            <a:r>
+              <a:rPr lang="en-US" sz="1500" dirty="0"/>
+              <a:t>    Divide time into windows:</a:t>
+            </a:r>
+          </a:p>
+          <a:p>
+            <a:r>
+              <a:rPr lang="en-US" sz="1500" dirty="0"/>
+              <a:t>        [t0, t0+T], [t0+T, t0+2T], ...</a:t>
+            </a:r>
+          </a:p>
+          <a:p>
+            <a:endParaRPr lang="en-US" sz="1500" dirty="0"/>
+          </a:p>
+          <a:p>
+            <a:r>
+              <a:rPr lang="en-US" sz="1500" dirty="0"/>
+              <a:t>    FOR each time window W:</a:t>
+            </a:r>
+          </a:p>
+          <a:p>
+            <a:r>
+              <a:rPr lang="en-US" sz="1500" dirty="0"/>
+              <a:t>        ----------------------------</a:t>
+            </a:r>
+          </a:p>
+          <a:p>
+            <a:r>
+              <a:rPr lang="en-US" sz="1500" dirty="0"/>
+              <a:t>        STEP 1: Compute Flow (q)</a:t>
+            </a:r>
+          </a:p>
+          <a:p>
+            <a:r>
+              <a:rPr lang="en-US" sz="1500" dirty="0"/>
+              <a:t>        ----------------------------</a:t>
+            </a:r>
+          </a:p>
+          <a:p>
+            <a:r>
+              <a:rPr lang="en-US" sz="1500" dirty="0"/>
+              <a:t>        Count vehicles that ENTER segment during W:</a:t>
+            </a:r>
+          </a:p>
+          <a:p>
+            <a:endParaRPr lang="en-US" sz="1500" dirty="0"/>
+          </a:p>
+          <a:p>
+            <a:r>
+              <a:rPr lang="en-US" sz="1500" dirty="0"/>
+              <a:t>            </a:t>
+            </a:r>
+            <a:r>
+              <a:rPr lang="en-US" sz="1500" dirty="0" err="1"/>
+              <a:t>N_entry</a:t>
+            </a:r>
+            <a:r>
+              <a:rPr lang="en-US" sz="1500" dirty="0"/>
+              <a:t> = number of vehicles whose entry time ∈ W</a:t>
+            </a:r>
+          </a:p>
+          <a:p>
+            <a:endParaRPr lang="en-US" sz="1500" dirty="0"/>
+          </a:p>
+          <a:p>
+            <a:r>
+              <a:rPr lang="en-US" sz="1500" dirty="0"/>
+              <a:t>        Flow:</a:t>
+            </a:r>
+          </a:p>
+          <a:p>
+            <a:r>
+              <a:rPr lang="en-US" sz="1500" dirty="0"/>
+              <a:t>            q = </a:t>
+            </a:r>
+            <a:r>
+              <a:rPr lang="en-US" sz="1500" dirty="0" err="1"/>
+              <a:t>N_entry</a:t>
+            </a:r>
+            <a:r>
+              <a:rPr lang="en-US" sz="1500" dirty="0"/>
+              <a:t> / T</a:t>
+            </a:r>
+          </a:p>
+          <a:p>
+            <a:endParaRPr lang="en-US" sz="1500" dirty="0"/>
+          </a:p>
+          <a:p>
+            <a:r>
+              <a:rPr lang="en-US" sz="1500" dirty="0"/>
+              <a:t>        ----------------------------</a:t>
+            </a:r>
+          </a:p>
+          <a:p>
+            <a:r>
+              <a:rPr lang="en-US" sz="1500" dirty="0"/>
+              <a:t>        STEP 2: Compute Density (k)</a:t>
+            </a:r>
+          </a:p>
+          <a:p>
+            <a:r>
+              <a:rPr lang="en-US" sz="1500" dirty="0"/>
+              <a:t>        ----------------------------</a:t>
+            </a:r>
+          </a:p>
+          <a:p>
+            <a:r>
+              <a:rPr lang="en-US" sz="1500" dirty="0"/>
+              <a:t>        For each time instant t in W:</a:t>
+            </a:r>
+          </a:p>
+          <a:p>
+            <a:endParaRPr lang="en-US" sz="1500" dirty="0"/>
+          </a:p>
+          <a:p>
+            <a:r>
+              <a:rPr lang="en-US" sz="1500" dirty="0"/>
+              <a:t>            Count vehicles inside segment:</a:t>
+            </a:r>
+          </a:p>
+          <a:p>
+            <a:r>
+              <a:rPr lang="en-US" sz="1500" dirty="0"/>
+              <a:t>                N(t) = number of vehicles with position in [</a:t>
+            </a:r>
+            <a:r>
+              <a:rPr lang="en-US" sz="1500" dirty="0" err="1"/>
+              <a:t>x_start</a:t>
+            </a:r>
+            <a:r>
+              <a:rPr lang="en-US" sz="1500" dirty="0"/>
+              <a:t>, </a:t>
+            </a:r>
+            <a:r>
+              <a:rPr lang="en-US" sz="1500" dirty="0" err="1"/>
+              <a:t>x_end</a:t>
+            </a:r>
+            <a:r>
+              <a:rPr lang="en-US" sz="1500" dirty="0"/>
+              <a:t>]</a:t>
+            </a:r>
+          </a:p>
+          <a:p>
+            <a:endParaRPr lang="en-US" sz="1500" dirty="0"/>
+          </a:p>
+          <a:p>
+            <a:r>
+              <a:rPr lang="en-US" sz="1500" dirty="0"/>
+              <a:t>        Average number of vehicles:</a:t>
+            </a:r>
+          </a:p>
+          <a:p>
+            <a:r>
+              <a:rPr lang="en-US" sz="1500" dirty="0"/>
+              <a:t>            </a:t>
+            </a:r>
+            <a:r>
+              <a:rPr lang="en-US" sz="1500" dirty="0" err="1"/>
+              <a:t>N_avg</a:t>
+            </a:r>
+            <a:r>
+              <a:rPr lang="en-US" sz="1500" dirty="0"/>
+              <a:t> = (1 / T) * ∫ N(t) dt</a:t>
+            </a:r>
+          </a:p>
+          <a:p>
+            <a:r>
+              <a:rPr lang="en-US" sz="1500" dirty="0"/>
+              <a:t>                  ≈ mean over sampled timestamps</a:t>
+            </a:r>
+          </a:p>
+          <a:p>
+            <a:endParaRPr lang="en-US" sz="1500" dirty="0"/>
+          </a:p>
+          <a:p>
+            <a:r>
+              <a:rPr lang="en-US" sz="1500" dirty="0"/>
+              <a:t>        Density:</a:t>
+            </a:r>
+          </a:p>
+          <a:p>
+            <a:r>
+              <a:rPr lang="en-US" sz="1500" dirty="0"/>
+              <a:t>            k = </a:t>
+            </a:r>
+            <a:r>
+              <a:rPr lang="en-US" sz="1500" dirty="0" err="1"/>
+              <a:t>N_avg</a:t>
+            </a:r>
+            <a:r>
+              <a:rPr lang="en-US" sz="1500" dirty="0"/>
+              <a:t> / L</a:t>
+            </a:r>
+          </a:p>
+          <a:p>
+            <a:r>
+              <a:rPr lang="en-US" sz="1500" dirty="0"/>
+              <a:t>        ----------------------------</a:t>
+            </a:r>
+          </a:p>
+          <a:p>
+            <a:r>
+              <a:rPr lang="en-US" sz="1500" dirty="0"/>
+              <a:t>        STEP 3: Compute SMS</a:t>
+            </a:r>
+          </a:p>
+          <a:p>
+            <a:r>
+              <a:rPr lang="en-US" sz="1500" dirty="0"/>
+              <a:t>        ----------------------------</a:t>
+            </a:r>
+          </a:p>
+          <a:p>
+            <a:r>
+              <a:rPr lang="en-US" sz="1500" dirty="0"/>
+              <a:t>        IF k &gt; 0:</a:t>
+            </a:r>
+          </a:p>
+          <a:p>
+            <a:r>
+              <a:rPr lang="en-US" sz="1500" dirty="0"/>
+              <a:t>            </a:t>
+            </a:r>
+            <a:r>
+              <a:rPr lang="en-US" sz="1500" dirty="0" err="1"/>
+              <a:t>v_s</a:t>
+            </a:r>
+            <a:r>
+              <a:rPr lang="en-US" sz="1500" dirty="0"/>
+              <a:t> = q / k</a:t>
+            </a:r>
+          </a:p>
+          <a:p>
+            <a:r>
+              <a:rPr lang="en-US" sz="1500" dirty="0"/>
+              <a:t>        ELSE:</a:t>
+            </a:r>
+          </a:p>
+          <a:p>
+            <a:r>
+              <a:rPr lang="en-US" sz="1500" dirty="0"/>
+              <a:t>            </a:t>
+            </a:r>
+            <a:r>
+              <a:rPr lang="en-US" sz="1500" dirty="0" err="1"/>
+              <a:t>v_s</a:t>
+            </a:r>
+            <a:r>
+              <a:rPr lang="en-US" sz="1500" dirty="0"/>
+              <a:t> = </a:t>
+            </a:r>
+            <a:r>
+              <a:rPr lang="en-US" sz="1500" dirty="0" err="1"/>
+              <a:t>NaN</a:t>
+            </a:r>
+            <a:endParaRPr lang="en-US" sz="1500" dirty="0"/>
+          </a:p>
+          <a:p>
+            <a:endParaRPr lang="en-US" sz="1500" dirty="0"/>
+          </a:p>
+          <a:p>
+            <a:r>
+              <a:rPr lang="en-US" sz="1500" dirty="0"/>
+              <a:t>        ----------------------------</a:t>
+            </a:r>
+          </a:p>
+          <a:p>
+            <a:r>
+              <a:rPr lang="en-US" sz="1500" dirty="0"/>
+              <a:t>        STEP 4: Store Results</a:t>
+            </a:r>
+          </a:p>
+          <a:p>
+            <a:r>
+              <a:rPr lang="en-US" sz="1500" dirty="0"/>
+              <a:t>        ----------------------------</a:t>
+            </a:r>
+          </a:p>
+          <a:p>
+            <a:r>
+              <a:rPr lang="en-US" sz="1500" dirty="0"/>
+              <a:t>        Save:</a:t>
+            </a:r>
+          </a:p>
+          <a:p>
+            <a:r>
+              <a:rPr lang="en-US" sz="1500" dirty="0"/>
+              <a:t>            interval T</a:t>
+            </a:r>
+          </a:p>
+          <a:p>
+            <a:r>
+              <a:rPr lang="en-US" sz="1500" dirty="0"/>
+              <a:t>            time window W</a:t>
+            </a:r>
+          </a:p>
+          <a:p>
+            <a:r>
+              <a:rPr lang="en-US" sz="1500" dirty="0"/>
+              <a:t>            flow q</a:t>
+            </a:r>
+          </a:p>
+          <a:p>
+            <a:r>
+              <a:rPr lang="en-US" sz="1500" dirty="0"/>
+              <a:t>            density k</a:t>
+            </a:r>
+          </a:p>
+          <a:p>
+            <a:r>
+              <a:rPr lang="en-US" sz="1500" dirty="0"/>
+              <a:t>            space mean speed </a:t>
+            </a:r>
+            <a:r>
+              <a:rPr lang="en-US" sz="1500" dirty="0" err="1"/>
+              <a:t>v_s</a:t>
+            </a:r>
+            <a:endParaRPr lang="en-US" sz="1500" dirty="0"/>
+          </a:p>
+          <a:p>
+            <a:endParaRPr lang="en-US" sz="1500" dirty="0"/>
+          </a:p>
+          <a:p>
+            <a:r>
+              <a:rPr lang="en-US" sz="1500" dirty="0"/>
+              <a:t>POSTPROCESS:</a:t>
+            </a:r>
+          </a:p>
+          <a:p>
+            <a:endParaRPr lang="en-US" sz="1500" dirty="0"/>
+          </a:p>
+          <a:p>
+            <a:r>
+              <a:rPr lang="en-US" sz="1500" dirty="0"/>
+              <a:t>    For each interval T:</a:t>
+            </a:r>
+          </a:p>
+          <a:p>
+            <a:r>
+              <a:rPr lang="en-US" sz="1500" dirty="0"/>
+              <a:t>        Compute average SMS over all windows</a:t>
+            </a:r>
+          </a:p>
+          <a:p>
+            <a:endParaRPr lang="en-US" sz="1500" dirty="0"/>
+          </a:p>
+          <a:p>
+            <a:r>
+              <a:rPr lang="en-US" sz="1500" dirty="0"/>
+              <a:t>OUTPUT:</a:t>
+            </a:r>
+          </a:p>
+          <a:p>
+            <a:r>
+              <a:rPr lang="en-US" sz="1500" dirty="0"/>
+              <a:t>    Table:</a:t>
+            </a:r>
+          </a:p>
+          <a:p>
+            <a:r>
+              <a:rPr lang="en-US" sz="1500" dirty="0"/>
+              <a:t>        interval | </a:t>
+            </a:r>
+            <a:r>
+              <a:rPr lang="en-US" sz="1500" dirty="0" err="1"/>
+              <a:t>avg_flow</a:t>
+            </a:r>
+            <a:r>
+              <a:rPr lang="en-US" sz="1500" dirty="0"/>
+              <a:t> | </a:t>
+            </a:r>
+            <a:r>
+              <a:rPr lang="en-US" sz="1500" dirty="0" err="1"/>
+              <a:t>avg_density</a:t>
+            </a:r>
+            <a:r>
+              <a:rPr lang="en-US" sz="1500" dirty="0"/>
+              <a:t> | </a:t>
+            </a:r>
+            <a:r>
+              <a:rPr lang="en-US" sz="1500" dirty="0" err="1"/>
+              <a:t>avg_space_mean_speed</a:t>
+            </a:r>
+            <a:endParaRPr lang="en-US" sz="1500" dirty="0"/>
+          </a:p>
+        </p:txBody>
+      </p:sp>
     </p:spTree>
     <p:extLst>
       <p:ext uri="{BB962C8B-B14F-4D97-AF65-F5344CB8AC3E}">
-        <p14:creationId xmlns:p14="http://schemas.microsoft.com/office/powerpoint/2010/main" val="1188017702"/>
+        <p14:creationId xmlns:p14="http://schemas.microsoft.com/office/powerpoint/2010/main" val="2775789098"/>
       </p:ext>
     </p:extLst>
   </p:cSld>
